--- a/marketplace_safety_slides.pptx
+++ b/marketplace_safety_slides.pptx
@@ -122,6 +122,7 @@
 <p1510:revInfo xmlns:a="http://schemas.openxmlformats.org/drawingml/2006/main" xmlns:r="http://schemas.openxmlformats.org/officeDocument/2006/relationships" xmlns:p1510="http://schemas.microsoft.com/office/powerpoint/2015/10/main">
   <p1510:revLst>
     <p1510:client id="{2D54AF1E-4C82-48AE-BAD0-2A999153E33B}" v="56" dt="2026-03-16T14:49:07.663"/>
+    <p1510:client id="{C57D1E17-A48F-4CD3-B01B-1AF411EFE372}" v="1" dt="2026-03-17T11:55:56.632"/>
   </p1510:revLst>
 </p1510:revInfo>
 </file>
@@ -131,7 +132,7 @@
   <pc:docChgLst>
     <pc:chgData name="Yunus Emre Capar" userId="6e34af16be8e7db1" providerId="LiveId" clId="{1A4E8B3D-71E9-45CB-9AC9-58DE4384F4B0}"/>
     <pc:docChg chg="undo custSel modSld">
-      <pc:chgData name="Yunus Emre Capar" userId="6e34af16be8e7db1" providerId="LiveId" clId="{1A4E8B3D-71E9-45CB-9AC9-58DE4384F4B0}" dt="2026-03-16T14:49:07.663" v="190"/>
+      <pc:chgData name="Yunus Emre Capar" userId="6e34af16be8e7db1" providerId="LiveId" clId="{1A4E8B3D-71E9-45CB-9AC9-58DE4384F4B0}" dt="2026-03-17T11:56:57.776" v="204" actId="14100"/>
       <pc:docMkLst>
         <pc:docMk/>
       </pc:docMkLst>
@@ -372,7 +373,7 @@
         </pc:graphicFrameChg>
       </pc:sldChg>
       <pc:sldChg chg="modSp mod">
-        <pc:chgData name="Yunus Emre Capar" userId="6e34af16be8e7db1" providerId="LiveId" clId="{1A4E8B3D-71E9-45CB-9AC9-58DE4384F4B0}" dt="2026-03-16T14:49:07.663" v="190"/>
+        <pc:chgData name="Yunus Emre Capar" userId="6e34af16be8e7db1" providerId="LiveId" clId="{1A4E8B3D-71E9-45CB-9AC9-58DE4384F4B0}" dt="2026-03-17T11:56:57.776" v="204" actId="14100"/>
         <pc:sldMkLst>
           <pc:docMk/>
           <pc:sldMk cId="0" sldId="262"/>
@@ -386,7 +387,15 @@
           </ac:spMkLst>
         </pc:spChg>
         <pc:spChg chg="mod">
-          <ac:chgData name="Yunus Emre Capar" userId="6e34af16be8e7db1" providerId="LiveId" clId="{1A4E8B3D-71E9-45CB-9AC9-58DE4384F4B0}" dt="2026-03-16T14:46:30.943" v="188" actId="20577"/>
+          <ac:chgData name="Yunus Emre Capar" userId="6e34af16be8e7db1" providerId="LiveId" clId="{1A4E8B3D-71E9-45CB-9AC9-58DE4384F4B0}" dt="2026-03-17T11:56:43.504" v="203" actId="255"/>
+          <ac:spMkLst>
+            <pc:docMk/>
+            <pc:sldMk cId="0" sldId="262"/>
+            <ac:spMk id="6" creationId="{00000000-0000-0000-0000-000000000000}"/>
+          </ac:spMkLst>
+        </pc:spChg>
+        <pc:spChg chg="mod">
+          <ac:chgData name="Yunus Emre Capar" userId="6e34af16be8e7db1" providerId="LiveId" clId="{1A4E8B3D-71E9-45CB-9AC9-58DE4384F4B0}" dt="2026-03-17T11:56:39.203" v="202" actId="255"/>
           <ac:spMkLst>
             <pc:docMk/>
             <pc:sldMk cId="0" sldId="262"/>
@@ -394,7 +403,7 @@
           </ac:spMkLst>
         </pc:spChg>
         <pc:spChg chg="mod">
-          <ac:chgData name="Yunus Emre Capar" userId="6e34af16be8e7db1" providerId="LiveId" clId="{1A4E8B3D-71E9-45CB-9AC9-58DE4384F4B0}" dt="2026-03-16T14:48:50.683" v="189"/>
+          <ac:chgData name="Yunus Emre Capar" userId="6e34af16be8e7db1" providerId="LiveId" clId="{1A4E8B3D-71E9-45CB-9AC9-58DE4384F4B0}" dt="2026-03-17T11:56:57.776" v="204" actId="14100"/>
           <ac:spMkLst>
             <pc:docMk/>
             <pc:sldMk cId="0" sldId="262"/>
@@ -8429,7 +8438,7 @@
               <a:buChar char="•"/>
             </a:pPr>
             <a:r>
-              <a:rPr lang="en-US" sz="1580" i="1" dirty="0">
+              <a:rPr lang="en-US" sz="1600" i="1" dirty="0">
                 <a:solidFill>
                   <a:srgbClr val="24323A"/>
                 </a:solidFill>
@@ -8439,7 +8448,7 @@
               </a:rPr>
               <a:t>load_pipeline → load_new → prioritize_new_data</a:t>
             </a:r>
-            <a:endParaRPr lang="en-US" sz="1580" i="1" dirty="0"/>
+            <a:endParaRPr lang="en-US" sz="1600" i="1" dirty="0"/>
           </a:p>
         </p:txBody>
       </p:sp>
@@ -8469,17 +8478,17 @@
               <a:buChar char="•"/>
             </a:pPr>
             <a:r>
-              <a:rPr lang="en-US" sz="1580" dirty="0">
-                <a:solidFill>
-                  <a:srgbClr val="24323A"/>
-                </a:solidFill>
-                <a:latin typeface="Arial" pitchFamily="34" charset="0"/>
-                <a:ea typeface="Arial" pitchFamily="34" charset="-122"/>
-                <a:cs typeface="Arial" pitchFamily="34" charset="-120"/>
-              </a:rPr>
-              <a:t>Vi flaggar Top  5% → ___ ärenden till granskning.</a:t>
-            </a:r>
-            <a:endParaRPr lang="en-US" sz="1580" dirty="0"/>
+              <a:rPr lang="en-US" sz="1600" dirty="0">
+                <a:solidFill>
+                  <a:srgbClr val="24323A"/>
+                </a:solidFill>
+                <a:latin typeface="Arial" pitchFamily="34" charset="0"/>
+                <a:ea typeface="Arial" pitchFamily="34" charset="-122"/>
+                <a:cs typeface="Arial" pitchFamily="34" charset="-120"/>
+              </a:rPr>
+              <a:t>Vi flaggar Top  5% → 100 ärenden till granskning.</a:t>
+            </a:r>
+            <a:endParaRPr lang="en-US" sz="1600" dirty="0"/>
           </a:p>
         </p:txBody>
       </p:sp>
@@ -8492,7 +8501,7 @@
         <p:spPr>
           <a:xfrm>
             <a:off x="4297680" y="2596896"/>
-            <a:ext cx="6766560" cy="310896"/>
+            <a:ext cx="6766560" cy="475488"/>
           </a:xfrm>
           <a:prstGeom prst="rect">
             <a:avLst/>
@@ -8510,9 +8519,17 @@
             </a:pPr>
             <a:r>
               <a:rPr lang="sv-SE" sz="1600" dirty="0"/>
-              <a:t>Reflektion: Top-5% ska ge en tydlig och hanterbar kö för teamet</a:t>
-            </a:r>
-            <a:endParaRPr lang="en-US" sz="1580" dirty="0"/>
+              <a:t>Reflektion: Vi fick 100 av 2000 (</a:t>
+            </a:r>
+            <a:r>
+              <a:rPr lang="sv-SE" sz="1600" dirty="0" err="1"/>
+              <a:t>Top</a:t>
+            </a:r>
+            <a:r>
+              <a:rPr lang="sv-SE" sz="1600" dirty="0"/>
+              <a:t> 5%), så volymen blev tydlig och hanterbar – precis som tänkt.</a:t>
+            </a:r>
+            <a:endParaRPr lang="en-US" sz="1600" dirty="0"/>
           </a:p>
         </p:txBody>
       </p:sp>
